--- a/docs/04_presentation/開発演習_発表資料_ウィーメックス_村山惠一郎.pptx
+++ b/docs/04_presentation/開発演習_発表資料_ウィーメックス_村山惠一郎.pptx
@@ -20,7 +20,7 @@
     <p:sldId id="270" r:id="rId11"/>
     <p:sldId id="260" r:id="rId12"/>
     <p:sldId id="271" r:id="rId13"/>
-    <p:sldId id="265" r:id="rId14"/>
+    <p:sldId id="273" r:id="rId14"/>
   </p:sldIdLst>
   <p:sldSz cx="12192000" cy="6858000"/>
   <p:notesSz cx="6858000" cy="9144000"/>
@@ -4548,7 +4548,7 @@
             <p:ph idx="1"/>
             <p:extLst>
               <p:ext uri="{D42A27DB-BD31-4B8C-83A1-F6EECF244321}">
-                <p14:modId xmlns:p14="http://schemas.microsoft.com/office/powerpoint/2010/main" val="1099428859"/>
+                <p14:modId xmlns:p14="http://schemas.microsoft.com/office/powerpoint/2010/main" val="994669348"/>
               </p:ext>
             </p:extLst>
           </p:nvPr>
@@ -9221,7 +9221,7 @@
                       <a:pPr algn="ctr" fontAlgn="ctr">
                         <a:buNone/>
                       </a:pPr>
-                      <a:endParaRPr lang="ja-JP" altLang="en-US" sz="1400" b="0" i="0" u="none" strike="noStrike">
+                      <a:endParaRPr lang="ja-JP" altLang="en-US" sz="1400" b="0" i="0" u="none" strike="noStrike" dirty="0">
                         <a:solidFill>
                           <a:srgbClr val="000000"/>
                         </a:solidFill>
@@ -21299,7 +21299,7 @@
         <p:spPr>
           <a:xfrm>
             <a:off x="3047198" y="4947726"/>
-            <a:ext cx="6097604" cy="1583500"/>
+            <a:ext cx="6097604" cy="1343989"/>
           </a:xfrm>
           <a:prstGeom prst="roundRect">
             <a:avLst>
@@ -21474,7 +21474,13 @@
   <p:cSld>
     <p:spTree>
       <p:nvGrpSpPr>
-        <p:cNvPr id="1" name=""/>
+        <p:cNvPr id="1" name="">
+          <a:extLst>
+            <a:ext uri="{FF2B5EF4-FFF2-40B4-BE49-F238E27FC236}">
+              <a16:creationId xmlns:a16="http://schemas.microsoft.com/office/drawing/2014/main" id="{2C31CD22-998D-BB1E-32A5-3A837752D2E7}"/>
+            </a:ext>
+          </a:extLst>
+        </p:cNvPr>
         <p:cNvGrpSpPr/>
         <p:nvPr/>
       </p:nvGrpSpPr>
@@ -21488,10 +21494,133 @@
       </p:grpSpPr>
       <p:sp>
         <p:nvSpPr>
-          <p:cNvPr id="2" name="タイトル 1">
+          <p:cNvPr id="21" name="フリーフォーム: 図形 20">
             <a:extLst>
               <a:ext uri="{FF2B5EF4-FFF2-40B4-BE49-F238E27FC236}">
-                <a16:creationId xmlns:a16="http://schemas.microsoft.com/office/drawing/2014/main" id="{DA37D495-1807-0555-CED1-D38CD873C616}"/>
+                <a16:creationId xmlns:a16="http://schemas.microsoft.com/office/drawing/2014/main" id="{E7F148B6-2F78-95E0-F0C7-50A490BCF667}"/>
+              </a:ext>
+            </a:extLst>
+          </p:cNvPr>
+          <p:cNvSpPr/>
+          <p:nvPr/>
+        </p:nvSpPr>
+        <p:spPr>
+          <a:xfrm rot="10800000">
+            <a:off x="5311589" y="2976754"/>
+            <a:ext cx="1568824" cy="2190731"/>
+          </a:xfrm>
+          <a:custGeom>
+            <a:avLst/>
+            <a:gdLst>
+              <a:gd name="csX0" fmla="*/ 1303524 w 1568824"/>
+              <a:gd name="csY0" fmla="*/ 2190731 h 2190731"/>
+              <a:gd name="csX1" fmla="*/ 265299 w 1568824"/>
+              <a:gd name="csY1" fmla="*/ 2190731 h 2190731"/>
+              <a:gd name="csX2" fmla="*/ 265299 w 1568824"/>
+              <a:gd name="csY2" fmla="*/ 627530 h 2190731"/>
+              <a:gd name="csX3" fmla="*/ 0 w 1568824"/>
+              <a:gd name="csY3" fmla="*/ 627530 h 2190731"/>
+              <a:gd name="csX4" fmla="*/ 784412 w 1568824"/>
+              <a:gd name="csY4" fmla="*/ 0 h 2190731"/>
+              <a:gd name="csX5" fmla="*/ 1568824 w 1568824"/>
+              <a:gd name="csY5" fmla="*/ 627530 h 2190731"/>
+              <a:gd name="csX6" fmla="*/ 1303524 w 1568824"/>
+              <a:gd name="csY6" fmla="*/ 627530 h 2190731"/>
+            </a:gdLst>
+            <a:ahLst/>
+            <a:cxnLst>
+              <a:cxn ang="0">
+                <a:pos x="csX0" y="csY0"/>
+              </a:cxn>
+              <a:cxn ang="0">
+                <a:pos x="csX1" y="csY1"/>
+              </a:cxn>
+              <a:cxn ang="0">
+                <a:pos x="csX2" y="csY2"/>
+              </a:cxn>
+              <a:cxn ang="0">
+                <a:pos x="csX3" y="csY3"/>
+              </a:cxn>
+              <a:cxn ang="0">
+                <a:pos x="csX4" y="csY4"/>
+              </a:cxn>
+              <a:cxn ang="0">
+                <a:pos x="csX5" y="csY5"/>
+              </a:cxn>
+              <a:cxn ang="0">
+                <a:pos x="csX6" y="csY6"/>
+              </a:cxn>
+            </a:cxnLst>
+            <a:rect l="l" t="t" r="r" b="b"/>
+            <a:pathLst>
+              <a:path w="1568824" h="2190731">
+                <a:moveTo>
+                  <a:pt x="1303524" y="2190731"/>
+                </a:moveTo>
+                <a:lnTo>
+                  <a:pt x="265299" y="2190731"/>
+                </a:lnTo>
+                <a:lnTo>
+                  <a:pt x="265299" y="627530"/>
+                </a:lnTo>
+                <a:lnTo>
+                  <a:pt x="0" y="627530"/>
+                </a:lnTo>
+                <a:lnTo>
+                  <a:pt x="784412" y="0"/>
+                </a:lnTo>
+                <a:lnTo>
+                  <a:pt x="1568824" y="627530"/>
+                </a:lnTo>
+                <a:lnTo>
+                  <a:pt x="1303524" y="627530"/>
+                </a:lnTo>
+                <a:close/>
+              </a:path>
+            </a:pathLst>
+          </a:custGeom>
+          <a:solidFill>
+            <a:schemeClr val="bg1">
+              <a:lumMod val="85000"/>
+            </a:schemeClr>
+          </a:solidFill>
+          <a:ln>
+            <a:noFill/>
+          </a:ln>
+        </p:spPr>
+        <p:style>
+          <a:lnRef idx="2">
+            <a:schemeClr val="accent1">
+              <a:shade val="15000"/>
+            </a:schemeClr>
+          </a:lnRef>
+          <a:fillRef idx="1">
+            <a:schemeClr val="accent1"/>
+          </a:fillRef>
+          <a:effectRef idx="0">
+            <a:schemeClr val="accent1"/>
+          </a:effectRef>
+          <a:fontRef idx="minor">
+            <a:schemeClr val="lt1"/>
+          </a:fontRef>
+        </p:style>
+        <p:txBody>
+          <a:bodyPr wrap="square" rtlCol="0" anchor="ctr">
+            <a:noAutofit/>
+          </a:bodyPr>
+          <a:lstStyle/>
+          <a:p>
+            <a:pPr algn="ctr"/>
+            <a:endParaRPr kumimoji="1" lang="ja-JP" altLang="en-US"/>
+          </a:p>
+        </p:txBody>
+      </p:sp>
+      <p:sp>
+        <p:nvSpPr>
+          <p:cNvPr id="9" name="テキスト プレースホルダー 8">
+            <a:extLst>
+              <a:ext uri="{FF2B5EF4-FFF2-40B4-BE49-F238E27FC236}">
+                <a16:creationId xmlns:a16="http://schemas.microsoft.com/office/drawing/2014/main" id="{D977713A-F59C-20E4-7E65-52A53A4F40A0}"/>
               </a:ext>
             </a:extLst>
           </p:cNvPr>
@@ -21499,19 +21628,25 @@
             <a:spLocks noGrp="1"/>
           </p:cNvSpPr>
           <p:nvPr>
-            <p:ph type="title"/>
+            <p:ph type="body" idx="1"/>
           </p:nvPr>
         </p:nvSpPr>
-        <p:spPr/>
+        <p:spPr>
+          <a:xfrm>
+            <a:off x="589531" y="1061210"/>
+            <a:ext cx="5157787" cy="534508"/>
+          </a:xfrm>
+        </p:spPr>
         <p:txBody>
-          <a:bodyPr/>
+          <a:bodyPr>
+            <a:normAutofit/>
+          </a:bodyPr>
           <a:lstStyle/>
           <a:p>
             <a:r>
-              <a:rPr lang="ja-JP" altLang="en-US" dirty="0"/>
-              <a:t>演習を通じて興味を持ったこと</a:t>
-            </a:r>
-            <a:endParaRPr kumimoji="1" lang="ja-JP" altLang="en-US" dirty="0"/>
+              <a:rPr lang="ja-JP" altLang="en-US" sz="2800" dirty="0"/>
+              <a:t>アーキテクチャ</a:t>
+            </a:r>
           </a:p>
         </p:txBody>
       </p:sp>
@@ -21520,7 +21655,7 @@
           <p:cNvPr id="4" name="スライド番号プレースホルダー 3">
             <a:extLst>
               <a:ext uri="{FF2B5EF4-FFF2-40B4-BE49-F238E27FC236}">
-                <a16:creationId xmlns:a16="http://schemas.microsoft.com/office/drawing/2014/main" id="{B428B8FF-D18B-1FDE-6116-E0E10EC7FD1E}"/>
+                <a16:creationId xmlns:a16="http://schemas.microsoft.com/office/drawing/2014/main" id="{99F77256-18F6-E162-A852-D472EFDF7C43}"/>
               </a:ext>
             </a:extLst>
           </p:cNvPr>
@@ -21546,74 +21681,40 @@
       </p:sp>
       <p:sp>
         <p:nvSpPr>
-          <p:cNvPr id="14" name="テキスト ボックス 13">
+          <p:cNvPr id="2" name="タイトル 1">
             <a:extLst>
               <a:ext uri="{FF2B5EF4-FFF2-40B4-BE49-F238E27FC236}">
-                <a16:creationId xmlns:a16="http://schemas.microsoft.com/office/drawing/2014/main" id="{56492554-276C-0CB3-DA02-39AAC52182CE}"/>
+                <a16:creationId xmlns:a16="http://schemas.microsoft.com/office/drawing/2014/main" id="{516D03BB-A714-BBF4-7282-3BA393F820DD}"/>
               </a:ext>
             </a:extLst>
           </p:cNvPr>
-          <p:cNvSpPr txBox="1"/>
-          <p:nvPr/>
+          <p:cNvSpPr>
+            <a:spLocks noGrp="1"/>
+          </p:cNvSpPr>
+          <p:nvPr>
+            <p:ph type="title"/>
+          </p:nvPr>
         </p:nvSpPr>
-        <p:spPr>
-          <a:xfrm>
-            <a:off x="1299218" y="5050744"/>
-            <a:ext cx="9593564" cy="461665"/>
-          </a:xfrm>
-          <a:prstGeom prst="rect">
-            <a:avLst/>
-          </a:prstGeom>
-          <a:noFill/>
-        </p:spPr>
+        <p:spPr/>
         <p:txBody>
-          <a:bodyPr wrap="square" rtlCol="0">
-            <a:spAutoFit/>
+          <a:bodyPr>
+            <a:normAutofit/>
           </a:bodyPr>
           <a:lstStyle/>
           <a:p>
             <a:r>
-              <a:rPr lang="en-US" altLang="ja-JP" sz="2400" b="1" dirty="0" err="1">
-                <a:effectLst>
-                  <a:outerShdw blurRad="38100" dist="38100" dir="2700000" algn="tl" rotWithShape="0">
-                    <a:prstClr val="black">
-                      <a:alpha val="13000"/>
-                    </a:prstClr>
-                  </a:outerShdw>
-                </a:effectLst>
-              </a:rPr>
-              <a:t>ToBe</a:t>
-            </a:r>
-            <a:r>
-              <a:rPr lang="ja-JP" altLang="en-US" sz="2400" b="1" dirty="0">
-                <a:effectLst>
-                  <a:outerShdw blurRad="38100" dist="38100" dir="2700000" algn="tl" rotWithShape="0">
-                    <a:prstClr val="black">
-                      <a:alpha val="13000"/>
-                    </a:prstClr>
-                  </a:outerShdw>
-                </a:effectLst>
-              </a:rPr>
-              <a:t>：自分のような駆け出しのエンジニアに説明できるようになる</a:t>
-            </a:r>
-            <a:endParaRPr kumimoji="1" lang="ja-JP" altLang="en-US" sz="2400" b="1" dirty="0">
-              <a:effectLst>
-                <a:outerShdw blurRad="38100" dist="38100" dir="2700000" algn="tl" rotWithShape="0">
-                  <a:prstClr val="black">
-                    <a:alpha val="13000"/>
-                  </a:prstClr>
-                </a:outerShdw>
-              </a:effectLst>
-            </a:endParaRPr>
+              <a:rPr kumimoji="1" lang="ja-JP" altLang="en-US" dirty="0"/>
+              <a:t>興味を持ったこと</a:t>
+            </a:r>
           </a:p>
         </p:txBody>
       </p:sp>
       <p:sp>
         <p:nvSpPr>
-          <p:cNvPr id="17" name="楕円 16">
+          <p:cNvPr id="15" name="四角形: 角を丸くする 14">
             <a:extLst>
               <a:ext uri="{FF2B5EF4-FFF2-40B4-BE49-F238E27FC236}">
-                <a16:creationId xmlns:a16="http://schemas.microsoft.com/office/drawing/2014/main" id="{2E9E3B10-95D2-066D-D378-4975F819F0F2}"/>
+                <a16:creationId xmlns:a16="http://schemas.microsoft.com/office/drawing/2014/main" id="{9475183F-B736-860D-F681-57CCB38935AF}"/>
               </a:ext>
             </a:extLst>
           </p:cNvPr>
@@ -21622,16 +21723,17 @@
         </p:nvSpPr>
         <p:spPr>
           <a:xfrm>
-            <a:off x="2070634" y="2588398"/>
-            <a:ext cx="2542674" cy="1742115"/>
+            <a:off x="3047198" y="1852524"/>
+            <a:ext cx="6097604" cy="1124230"/>
           </a:xfrm>
-          <a:prstGeom prst="ellipse">
-            <a:avLst/>
+          <a:prstGeom prst="roundRect">
+            <a:avLst>
+              <a:gd name="adj" fmla="val 6783"/>
+            </a:avLst>
           </a:prstGeom>
           <a:solidFill>
-            <a:schemeClr val="accent4">
-              <a:lumMod val="20000"/>
-              <a:lumOff val="80000"/>
+            <a:schemeClr val="bg1">
+              <a:lumMod val="85000"/>
             </a:schemeClr>
           </a:solidFill>
           <a:ln>
@@ -21655,7 +21757,7 @@
           </a:fontRef>
         </p:style>
         <p:txBody>
-          <a:bodyPr wrap="none" rtlCol="0" anchor="ctr"/>
+          <a:bodyPr rtlCol="0" anchor="ctr"/>
           <a:lstStyle/>
           <a:p>
             <a:pPr algn="ctr"/>
@@ -21665,17 +21767,22 @@
                   <a:schemeClr val="tx1"/>
                 </a:solidFill>
               </a:rPr>
-              <a:t>説明能力</a:t>
-            </a:r>
+              <a:t>複雑で理解できない</a:t>
+            </a:r>
+            <a:endParaRPr lang="en-US" altLang="ja-JP" dirty="0">
+              <a:solidFill>
+                <a:schemeClr val="tx1"/>
+              </a:solidFill>
+            </a:endParaRPr>
           </a:p>
         </p:txBody>
       </p:sp>
       <p:sp>
         <p:nvSpPr>
-          <p:cNvPr id="19" name="楕円 18">
+          <p:cNvPr id="16" name="四角形: 角を丸くする 15">
             <a:extLst>
               <a:ext uri="{FF2B5EF4-FFF2-40B4-BE49-F238E27FC236}">
-                <a16:creationId xmlns:a16="http://schemas.microsoft.com/office/drawing/2014/main" id="{7F32259D-3941-98C2-6AD2-EB0F79F4D8CF}"/>
+                <a16:creationId xmlns:a16="http://schemas.microsoft.com/office/drawing/2014/main" id="{7474A561-A027-8D27-8AE4-8D7A5C48511E}"/>
               </a:ext>
             </a:extLst>
           </p:cNvPr>
@@ -21684,136 +21791,12 @@
         </p:nvSpPr>
         <p:spPr>
           <a:xfrm>
-            <a:off x="4835892" y="2588398"/>
-            <a:ext cx="2542674" cy="1742115"/>
-          </a:xfrm>
-          <a:prstGeom prst="ellipse">
-            <a:avLst/>
-          </a:prstGeom>
-          <a:solidFill>
-            <a:schemeClr val="accent4">
-              <a:lumMod val="20000"/>
-              <a:lumOff val="80000"/>
-            </a:schemeClr>
-          </a:solidFill>
-          <a:ln>
-            <a:noFill/>
-          </a:ln>
-        </p:spPr>
-        <p:style>
-          <a:lnRef idx="2">
-            <a:schemeClr val="accent1">
-              <a:shade val="15000"/>
-            </a:schemeClr>
-          </a:lnRef>
-          <a:fillRef idx="1">
-            <a:schemeClr val="accent1"/>
-          </a:fillRef>
-          <a:effectRef idx="0">
-            <a:schemeClr val="accent1"/>
-          </a:effectRef>
-          <a:fontRef idx="minor">
-            <a:schemeClr val="lt1"/>
-          </a:fontRef>
-        </p:style>
-        <p:txBody>
-          <a:bodyPr wrap="none" rtlCol="0" anchor="ctr"/>
-          <a:lstStyle/>
-          <a:p>
-            <a:pPr algn="ctr"/>
-            <a:r>
-              <a:rPr lang="ja-JP" altLang="en-US" dirty="0">
-                <a:solidFill>
-                  <a:schemeClr val="tx1"/>
-                </a:solidFill>
-              </a:rPr>
-              <a:t>ドメイン知識</a:t>
-            </a:r>
-          </a:p>
-        </p:txBody>
-      </p:sp>
-      <p:sp>
-        <p:nvSpPr>
-          <p:cNvPr id="20" name="楕円 19">
-            <a:extLst>
-              <a:ext uri="{FF2B5EF4-FFF2-40B4-BE49-F238E27FC236}">
-                <a16:creationId xmlns:a16="http://schemas.microsoft.com/office/drawing/2014/main" id="{F6A8B276-83C8-B039-E92A-3E3A63347E7D}"/>
-              </a:ext>
-            </a:extLst>
-          </p:cNvPr>
-          <p:cNvSpPr/>
-          <p:nvPr/>
-        </p:nvSpPr>
-        <p:spPr>
-          <a:xfrm>
-            <a:off x="7578691" y="2588398"/>
-            <a:ext cx="2542674" cy="1742115"/>
-          </a:xfrm>
-          <a:prstGeom prst="ellipse">
-            <a:avLst/>
-          </a:prstGeom>
-          <a:solidFill>
-            <a:schemeClr val="accent4">
-              <a:lumMod val="20000"/>
-              <a:lumOff val="80000"/>
-            </a:schemeClr>
-          </a:solidFill>
-          <a:ln>
-            <a:noFill/>
-          </a:ln>
-        </p:spPr>
-        <p:style>
-          <a:lnRef idx="2">
-            <a:schemeClr val="accent1">
-              <a:shade val="15000"/>
-            </a:schemeClr>
-          </a:lnRef>
-          <a:fillRef idx="1">
-            <a:schemeClr val="accent1"/>
-          </a:fillRef>
-          <a:effectRef idx="0">
-            <a:schemeClr val="accent1"/>
-          </a:effectRef>
-          <a:fontRef idx="minor">
-            <a:schemeClr val="lt1"/>
-          </a:fontRef>
-        </p:style>
-        <p:txBody>
-          <a:bodyPr wrap="none" rtlCol="0" anchor="ctr"/>
-          <a:lstStyle/>
-          <a:p>
-            <a:pPr algn="ctr"/>
-            <a:r>
-              <a:rPr lang="ja-JP" altLang="en-US" dirty="0">
-                <a:solidFill>
-                  <a:schemeClr val="tx1"/>
-                </a:solidFill>
-              </a:rPr>
-              <a:t>プログラミング基礎</a:t>
-            </a:r>
-          </a:p>
-        </p:txBody>
-      </p:sp>
-      <p:sp>
-        <p:nvSpPr>
-          <p:cNvPr id="5" name="四角形: 角を丸くする 4">
-            <a:extLst>
-              <a:ext uri="{FF2B5EF4-FFF2-40B4-BE49-F238E27FC236}">
-                <a16:creationId xmlns:a16="http://schemas.microsoft.com/office/drawing/2014/main" id="{2AED608E-1143-AD7D-34DF-3EB8B01637FD}"/>
-              </a:ext>
-            </a:extLst>
-          </p:cNvPr>
-          <p:cNvSpPr/>
-          <p:nvPr/>
-        </p:nvSpPr>
-        <p:spPr>
-          <a:xfrm>
-            <a:off x="2563830" y="1961262"/>
-            <a:ext cx="7064341" cy="962527"/>
+            <a:off x="1880135" y="4947726"/>
+            <a:ext cx="8431730" cy="1343989"/>
           </a:xfrm>
           <a:prstGeom prst="roundRect">
             <a:avLst>
-              <a:gd name="adj" fmla="val 9963"/>
+              <a:gd name="adj" fmla="val 6783"/>
             </a:avLst>
           </a:prstGeom>
           <a:solidFill>
@@ -21847,17 +21830,132 @@
           <a:p>
             <a:pPr algn="ctr"/>
             <a:r>
-              <a:rPr lang="ja-JP" altLang="en-US" sz="2400" dirty="0"/>
-              <a:t>様々なアーキテクチャを知りたい</a:t>
-            </a:r>
-            <a:endParaRPr lang="en-US" altLang="ja-JP" sz="2400" dirty="0"/>
+              <a:rPr lang="en-US" altLang="ja-JP" b="1" dirty="0" err="1">
+                <a:effectLst>
+                  <a:outerShdw blurRad="38100" dist="38100" dir="2700000" algn="tl" rotWithShape="0">
+                    <a:prstClr val="black">
+                      <a:alpha val="13000"/>
+                    </a:prstClr>
+                  </a:outerShdw>
+                </a:effectLst>
+              </a:rPr>
+              <a:t>ToBe</a:t>
+            </a:r>
+            <a:r>
+              <a:rPr lang="ja-JP" altLang="en-US" b="1" dirty="0">
+                <a:effectLst>
+                  <a:outerShdw blurRad="38100" dist="38100" dir="2700000" algn="tl" rotWithShape="0">
+                    <a:prstClr val="black">
+                      <a:alpha val="13000"/>
+                    </a:prstClr>
+                  </a:outerShdw>
+                </a:effectLst>
+              </a:rPr>
+              <a:t>：違いを説明できる状態になる</a:t>
+            </a:r>
+          </a:p>
+        </p:txBody>
+      </p:sp>
+      <p:sp>
+        <p:nvSpPr>
+          <p:cNvPr id="18" name="四角形: 角を丸くする 17">
+            <a:extLst>
+              <a:ext uri="{FF2B5EF4-FFF2-40B4-BE49-F238E27FC236}">
+                <a16:creationId xmlns:a16="http://schemas.microsoft.com/office/drawing/2014/main" id="{219E9391-5E45-5750-D51B-392241680997}"/>
+              </a:ext>
+            </a:extLst>
+          </p:cNvPr>
+          <p:cNvSpPr/>
+          <p:nvPr/>
+        </p:nvSpPr>
+        <p:spPr>
+          <a:xfrm>
+            <a:off x="1880135" y="3319132"/>
+            <a:ext cx="8431730" cy="1124230"/>
+          </a:xfrm>
+          <a:prstGeom prst="roundRect">
+            <a:avLst>
+              <a:gd name="adj" fmla="val 6783"/>
+            </a:avLst>
+          </a:prstGeom>
+          <a:solidFill>
+            <a:schemeClr val="accent4">
+              <a:lumMod val="20000"/>
+              <a:lumOff val="80000"/>
+            </a:schemeClr>
+          </a:solidFill>
+          <a:ln>
+            <a:noFill/>
+          </a:ln>
+        </p:spPr>
+        <p:style>
+          <a:lnRef idx="2">
+            <a:schemeClr val="accent1">
+              <a:shade val="15000"/>
+            </a:schemeClr>
+          </a:lnRef>
+          <a:fillRef idx="1">
+            <a:schemeClr val="accent1"/>
+          </a:fillRef>
+          <a:effectRef idx="0">
+            <a:schemeClr val="accent1"/>
+          </a:effectRef>
+          <a:fontRef idx="minor">
+            <a:schemeClr val="lt1"/>
+          </a:fontRef>
+        </p:style>
+        <p:txBody>
+          <a:bodyPr rtlCol="0" anchor="ctr"/>
+          <a:lstStyle/>
+          <a:p>
+            <a:pPr algn="ctr"/>
+            <a:r>
+              <a:rPr lang="ja-JP" altLang="en-US" dirty="0">
+                <a:solidFill>
+                  <a:schemeClr val="tx1"/>
+                </a:solidFill>
+              </a:rPr>
+              <a:t>他にも様々なアーキテクチャがあることが判明</a:t>
+            </a:r>
+            <a:endParaRPr lang="en-US" altLang="ja-JP" dirty="0">
+              <a:solidFill>
+                <a:schemeClr val="tx1"/>
+              </a:solidFill>
+            </a:endParaRPr>
+          </a:p>
+          <a:p>
+            <a:pPr algn="ctr"/>
+            <a:r>
+              <a:rPr lang="ja-JP" altLang="en-US" dirty="0">
+                <a:solidFill>
+                  <a:schemeClr val="tx1"/>
+                </a:solidFill>
+              </a:rPr>
+              <a:t>理解すると合理的で美しい</a:t>
+            </a:r>
+            <a:endParaRPr lang="en-US" altLang="ja-JP" dirty="0">
+              <a:solidFill>
+                <a:schemeClr val="tx1"/>
+              </a:solidFill>
+            </a:endParaRPr>
+          </a:p>
+          <a:p>
+            <a:pPr algn="ctr"/>
+            <a:r>
+              <a:rPr lang="ja-JP" altLang="en-US" dirty="0">
+                <a:solidFill>
+                  <a:schemeClr val="tx1"/>
+                </a:solidFill>
+              </a:rPr>
+              <a:t>保守性を高めるために重要</a:t>
+            </a:r>
           </a:p>
         </p:txBody>
       </p:sp>
     </p:spTree>
     <p:extLst>
       <p:ext uri="{BB962C8B-B14F-4D97-AF65-F5344CB8AC3E}">
-        <p14:creationId xmlns:p14="http://schemas.microsoft.com/office/powerpoint/2010/main" val="2149049060"/>
+        <p14:creationId xmlns:p14="http://schemas.microsoft.com/office/powerpoint/2010/main" val="2163962018"/>
       </p:ext>
     </p:extLst>
   </p:cSld>
